--- a/curso_es/pptx/S48.pptx
+++ b/curso_es/pptx/S48.pptx
@@ -3901,7 +3901,7 @@
                 </a:solidFill>
                 <a:latin typeface="Nunito Sans"/>
               </a:rPr>
-              <a:t>Dylan ve un móvil «antes 600 €, ahora 350 €» que anuncia su youtuber favorito. Lee solo opiniones buenas y dice: «Sé mucho de móviles; es la mejor compra». (Inventado.)</a:t>
+              <a:t>Un chico ve un móvil «antes 600 €, ahora 350 €» que anuncia su youtuber favorito. Lee solo opiniones buenas y dice: «Sé mucho de móviles; es la mejor compra». (Inventado.)</a:t>
             </a:r>
           </a:p>
         </p:txBody>
@@ -4210,7 +4210,7 @@
                 </a:solidFill>
                 <a:latin typeface="Nunito Sans"/>
               </a:rPr>
-              <a:t>Naiara quería unas zapatillas desde hace meses. Ve «antes 100 €, ahora 60 €». Ha mirado en tres tiendas: en todas cuestan 100 €.</a:t>
+              <a:t>Una chica quería unas zapatillas desde hace meses. Ve «antes 100 €, ahora 60 €». Ha mirado en tres tiendas: en todas cuestan 100 €.</a:t>
             </a:r>
           </a:p>
         </p:txBody>
